--- a/week5_diffusion/slides/week5_diffusion.pptx
+++ b/week5_diffusion/slides/week5_diffusion.pptx
@@ -19,18 +19,16 @@
     <p:sldId id="267" r:id="rId13"/>
     <p:sldId id="268" r:id="rId14"/>
     <p:sldId id="269" r:id="rId15"/>
-    <p:sldId id="273" r:id="rId16"/>
-    <p:sldId id="270" r:id="rId17"/>
-    <p:sldId id="271" r:id="rId18"/>
-    <p:sldId id="272" r:id="rId19"/>
+    <p:sldId id="270" r:id="rId16"/>
+    <p:sldId id="271" r:id="rId17"/>
+    <p:sldId id="272" r:id="rId18"/>
+    <p:sldId id="273" r:id="rId19"/>
     <p:sldId id="274" r:id="rId20"/>
     <p:sldId id="275" r:id="rId21"/>
     <p:sldId id="276" r:id="rId22"/>
     <p:sldId id="277" r:id="rId23"/>
     <p:sldId id="278" r:id="rId24"/>
     <p:sldId id="279" r:id="rId25"/>
-    <p:sldId id="280" r:id="rId26"/>
-    <p:sldId id="281" r:id="rId27"/>
   </p:sldIdLst>
   <p:sldSz cx="12192000" cy="6858000"/>
   <p:notesSz cx="6858000" cy="9144000"/>
@@ -327,7 +325,7 @@
           <a:p>
             <a:fld id="{5BCAD085-E8A6-8845-BD4E-CB4CCA059FC4}" type="datetimeFigureOut">
               <a:rPr lang="en-US" smtClean="0"/>
-              <a:t>9/25/26</a:t>
+              <a:t>10/9/26</a:t>
             </a:fld>
             <a:endParaRPr lang="en-US"/>
           </a:p>
@@ -495,7 +493,7 @@
           <a:p>
             <a:fld id="{5BCAD085-E8A6-8845-BD4E-CB4CCA059FC4}" type="datetimeFigureOut">
               <a:rPr lang="en-US" smtClean="0"/>
-              <a:t>9/25/26</a:t>
+              <a:t>10/9/26</a:t>
             </a:fld>
             <a:endParaRPr lang="en-US"/>
           </a:p>
@@ -673,7 +671,7 @@
           <a:p>
             <a:fld id="{5BCAD085-E8A6-8845-BD4E-CB4CCA059FC4}" type="datetimeFigureOut">
               <a:rPr lang="en-US" smtClean="0"/>
-              <a:t>9/25/26</a:t>
+              <a:t>10/9/26</a:t>
             </a:fld>
             <a:endParaRPr lang="en-US"/>
           </a:p>
@@ -841,7 +839,7 @@
           <a:p>
             <a:fld id="{5BCAD085-E8A6-8845-BD4E-CB4CCA059FC4}" type="datetimeFigureOut">
               <a:rPr lang="en-US" smtClean="0"/>
-              <a:t>9/25/26</a:t>
+              <a:t>10/9/26</a:t>
             </a:fld>
             <a:endParaRPr lang="en-US"/>
           </a:p>
@@ -1086,7 +1084,7 @@
           <a:p>
             <a:fld id="{5BCAD085-E8A6-8845-BD4E-CB4CCA059FC4}" type="datetimeFigureOut">
               <a:rPr lang="en-US" smtClean="0"/>
-              <a:t>9/25/26</a:t>
+              <a:t>10/9/26</a:t>
             </a:fld>
             <a:endParaRPr lang="en-US"/>
           </a:p>
@@ -1371,7 +1369,7 @@
           <a:p>
             <a:fld id="{5BCAD085-E8A6-8845-BD4E-CB4CCA059FC4}" type="datetimeFigureOut">
               <a:rPr lang="en-US" smtClean="0"/>
-              <a:t>9/25/26</a:t>
+              <a:t>10/9/26</a:t>
             </a:fld>
             <a:endParaRPr lang="en-US"/>
           </a:p>
@@ -1790,7 +1788,7 @@
           <a:p>
             <a:fld id="{5BCAD085-E8A6-8845-BD4E-CB4CCA059FC4}" type="datetimeFigureOut">
               <a:rPr lang="en-US" smtClean="0"/>
-              <a:t>9/25/26</a:t>
+              <a:t>10/9/26</a:t>
             </a:fld>
             <a:endParaRPr lang="en-US"/>
           </a:p>
@@ -1907,7 +1905,7 @@
           <a:p>
             <a:fld id="{5BCAD085-E8A6-8845-BD4E-CB4CCA059FC4}" type="datetimeFigureOut">
               <a:rPr lang="en-US" smtClean="0"/>
-              <a:t>9/25/26</a:t>
+              <a:t>10/9/26</a:t>
             </a:fld>
             <a:endParaRPr lang="en-US"/>
           </a:p>
@@ -2002,7 +2000,7 @@
           <a:p>
             <a:fld id="{5BCAD085-E8A6-8845-BD4E-CB4CCA059FC4}" type="datetimeFigureOut">
               <a:rPr lang="en-US" smtClean="0"/>
-              <a:t>9/25/26</a:t>
+              <a:t>10/9/26</a:t>
             </a:fld>
             <a:endParaRPr lang="en-US"/>
           </a:p>
@@ -2277,7 +2275,7 @@
           <a:p>
             <a:fld id="{5BCAD085-E8A6-8845-BD4E-CB4CCA059FC4}" type="datetimeFigureOut">
               <a:rPr lang="en-US" smtClean="0"/>
-              <a:t>9/25/26</a:t>
+              <a:t>10/9/26</a:t>
             </a:fld>
             <a:endParaRPr lang="en-US"/>
           </a:p>
@@ -2529,7 +2527,7 @@
           <a:p>
             <a:fld id="{5BCAD085-E8A6-8845-BD4E-CB4CCA059FC4}" type="datetimeFigureOut">
               <a:rPr lang="en-US" smtClean="0"/>
-              <a:t>9/25/26</a:t>
+              <a:t>10/9/26</a:t>
             </a:fld>
             <a:endParaRPr lang="en-US"/>
           </a:p>
@@ -2740,7 +2738,7 @@
           <a:p>
             <a:fld id="{5BCAD085-E8A6-8845-BD4E-CB4CCA059FC4}" type="datetimeFigureOut">
               <a:rPr lang="en-US" smtClean="0"/>
-              <a:t>9/25/26</a:t>
+              <a:t>10/9/26</a:t>
             </a:fld>
             <a:endParaRPr lang="en-US"/>
           </a:p>
@@ -4918,7 +4916,7 @@
                 </a:solidFill>
                 <a:latin typeface="Helvetica Neue"/>
               </a:rPr>
-              <a:t>PART 2: ATTENTION (1/3)</a:t>
+              <a:t>PART 2: ATTENTION (1/2)</a:t>
             </a:r>
           </a:p>
         </p:txBody>
@@ -5047,7 +5045,7 @@
                 </a:solidFill>
                 <a:latin typeface="Helvetica Neue"/>
               </a:rPr>
-              <a:t>A transformer works on tokens: rows of d numbers, each describing one piece of the input (ours, later: one 2 x 2 patch of the image).</a:t>
+              <a:t>A transformer works on tokens: rows of d numbers, each describing one piece of the input (ours: one 2 x 2 patch of the image, so N = 256 and d = 176).</a:t>
             </a:r>
           </a:p>
         </p:txBody>
@@ -5083,7 +5081,7 @@
               </a:spcAft>
             </a:pPr>
             <a:r>
-              <a:rPr sz="1700" b="0" dirty="0">
+              <a:rPr sz="1700" b="0">
                 <a:solidFill>
                   <a:srgbClr val="1C222B"/>
                 </a:solidFill>
@@ -5215,49 +5213,13 @@
               </a:spcAft>
             </a:pPr>
             <a:r>
-              <a:rPr sz="1500" b="0" dirty="0">
+              <a:rPr sz="1500" b="0">
                 <a:solidFill>
                   <a:srgbClr val="6B7582"/>
                 </a:solidFill>
                 <a:latin typeface="Helvetica Neue"/>
               </a:rPr>
-              <a:t>Q K^T: an N x N table of match scores (dot products), one per pair of tokens.   / sqrt(d): stops the scores growing with d, so </a:t>
-            </a:r>
-            <a:r>
-              <a:rPr sz="1500" b="0" dirty="0" err="1">
-                <a:solidFill>
-                  <a:srgbClr val="6B7582"/>
-                </a:solidFill>
-                <a:latin typeface="Helvetica Neue"/>
-              </a:rPr>
-              <a:t>softmax</a:t>
-            </a:r>
-            <a:r>
-              <a:rPr sz="1500" b="0" dirty="0">
-                <a:solidFill>
-                  <a:srgbClr val="6B7582"/>
-                </a:solidFill>
-                <a:latin typeface="Helvetica Neue"/>
-              </a:rPr>
-              <a:t> does not put all the weight on one token.   </a:t>
-            </a:r>
-            <a:r>
-              <a:rPr sz="1500" b="0" dirty="0" err="1">
-                <a:solidFill>
-                  <a:srgbClr val="6B7582"/>
-                </a:solidFill>
-                <a:latin typeface="Helvetica Neue"/>
-              </a:rPr>
-              <a:t>softmax</a:t>
-            </a:r>
-            <a:r>
-              <a:rPr sz="1500" b="0" dirty="0">
-                <a:solidFill>
-                  <a:srgbClr val="6B7582"/>
-                </a:solidFill>
-                <a:latin typeface="Helvetica Neue"/>
-              </a:rPr>
-              <a:t>: each row becomes positive weights that sum to 1.   x V: each token's output is a weighted average of all the tokens' values.</a:t>
+              <a:t>Q K^T: an N x N table of match scores (dot products), one per pair of tokens.   / sqrt(d): stops the scores growing with d, so softmax does not put all the weight on one token.   softmax: each row becomes positive weights that sum to 1.   x V: each token's output is a weighted average of all the tokens' values.</a:t>
             </a:r>
           </a:p>
         </p:txBody>
@@ -5293,7 +5255,7 @@
               </a:spcAft>
             </a:pPr>
             <a:r>
-              <a:rPr sz="1700" b="0" dirty="0">
+              <a:rPr sz="1700" b="0">
                 <a:solidFill>
                   <a:srgbClr val="1C222B"/>
                 </a:solidFill>
@@ -5374,7 +5336,7 @@
                 </a:solidFill>
                 <a:latin typeface="Helvetica Neue"/>
               </a:rPr>
-              <a:t>PART 2: ATTENTION (2/3)</a:t>
+              <a:t>PART 2: ATTENTION (2/2)</a:t>
             </a:r>
           </a:p>
         </p:txBody>
@@ -5602,7 +5564,7 @@
                 </a:solidFill>
                 <a:latin typeface="Helvetica Neue"/>
               </a:rPr>
-              <a:t>PART 2: ATTENTION (3/3)</a:t>
+              <a:t>PART 2: WHY ATTENTION</a:t>
             </a:r>
           </a:p>
         </p:txBody>
@@ -5644,7 +5606,7 @@
                 </a:solidFill>
                 <a:latin typeface="Helvetica Neue"/>
               </a:rPr>
-              <a:t>Several heads, each with its own weights</a:t>
+              <a:t>What attention offers that a convolution does not</a:t>
             </a:r>
           </a:p>
         </p:txBody>
@@ -5694,30 +5656,48 @@
           </a:p>
         </p:txBody>
       </p:sp>
-      <p:pic>
-        <p:nvPicPr>
-          <p:cNvPr id="5" name="Picture 4" descr="heads.png"/>
-          <p:cNvPicPr>
-            <a:picLocks noChangeAspect="1"/>
-          </p:cNvPicPr>
-          <p:nvPr/>
-        </p:nvPicPr>
-        <p:blipFill>
-          <a:blip r:embed="rId2"/>
-          <a:stretch>
-            <a:fillRect/>
-          </a:stretch>
-        </p:blipFill>
-        <p:spPr>
-          <a:xfrm>
-            <a:off x="1455267" y="1691640"/>
-            <a:ext cx="9281160" cy="2651760"/>
-          </a:xfrm>
-          <a:prstGeom prst="rect">
-            <a:avLst/>
-          </a:prstGeom>
-        </p:spPr>
-      </p:pic>
+      <p:sp>
+        <p:nvSpPr>
+          <p:cNvPr id="5" name="TextBox 4"/>
+          <p:cNvSpPr txBox="1"/>
+          <p:nvPr/>
+        </p:nvSpPr>
+        <p:spPr>
+          <a:xfrm>
+            <a:off x="777240" y="1783080"/>
+            <a:ext cx="10637215" cy="457200"/>
+          </a:xfrm>
+          <a:prstGeom prst="rect">
+            <a:avLst/>
+          </a:prstGeom>
+          <a:noFill/>
+        </p:spPr>
+        <p:txBody>
+          <a:bodyPr wrap="square">
+            <a:spAutoFit/>
+          </a:bodyPr>
+          <a:lstStyle/>
+          <a:p>
+            <a:pPr algn="l">
+              <a:lnSpc>
+                <a:spcPct val="115000"/>
+              </a:lnSpc>
+              <a:spcAft>
+                <a:spcPts val="600"/>
+              </a:spcAft>
+            </a:pPr>
+            <a:r>
+              <a:rPr sz="1700" b="0">
+                <a:solidFill>
+                  <a:srgbClr val="1C222B"/>
+                </a:solidFill>
+                <a:latin typeface="Helvetica Neue"/>
+              </a:rPr>
+              <a:t>1.  The whole image in one step. A 3 x 3 convolution sees only its neighbours; to see far, a CNN needs many layers or must shrink the image (the U-Net goes down to 4 x 4). Attention lets every patch use every other patch, in every block.</a:t>
+            </a:r>
+          </a:p>
+        </p:txBody>
+      </p:sp>
       <p:sp>
         <p:nvSpPr>
           <p:cNvPr id="6" name="TextBox 5"/>
@@ -5726,8 +5706,8 @@
         </p:nvSpPr>
         <p:spPr>
           <a:xfrm>
-            <a:off x="777240" y="4480560"/>
-            <a:ext cx="10637215" cy="1920240"/>
+            <a:off x="777240" y="2674239"/>
+            <a:ext cx="10637215" cy="457200"/>
           </a:xfrm>
           <a:prstGeom prst="rect">
             <a:avLst/>
@@ -5749,15 +5729,38 @@
               </a:spcAft>
             </a:pPr>
             <a:r>
-              <a:rPr sz="1450" b="0">
+              <a:rPr sz="1700" b="0">
                 <a:solidFill>
                   <a:srgbClr val="1C222B"/>
                 </a:solidFill>
                 <a:latin typeface="Helvetica Neue"/>
               </a:rPr>
-              <a:t>Q, K and V are cut into 4 slices of 44 numbers. Each slice (a head) runs the formula on its own, so it gets its own 256 x 256 weights: one head can follow the stroke while another looks at the neighbours. The d in sqrt(d) is the slice size, 44. Same number of weights as one big head.</a:t>
-            </a:r>
-          </a:p>
+              <a:t>2.  The mixing is chosen by the input. A convolution applies the same weights to every image. Attention computes its weights from the tokens themselves (previous slide).</a:t>
+            </a:r>
+          </a:p>
+        </p:txBody>
+      </p:sp>
+      <p:sp>
+        <p:nvSpPr>
+          <p:cNvPr id="7" name="TextBox 6"/>
+          <p:cNvSpPr txBox="1"/>
+          <p:nvPr/>
+        </p:nvSpPr>
+        <p:spPr>
+          <a:xfrm>
+            <a:off x="777240" y="3317113"/>
+            <a:ext cx="10637215" cy="457200"/>
+          </a:xfrm>
+          <a:prstGeom prst="rect">
+            <a:avLst/>
+          </a:prstGeom>
+          <a:noFill/>
+        </p:spPr>
+        <p:txBody>
+          <a:bodyPr wrap="square">
+            <a:spAutoFit/>
+          </a:bodyPr>
+          <a:lstStyle/>
           <a:p>
             <a:pPr algn="l">
               <a:lnSpc>
@@ -5768,13 +5771,139 @@
               </a:spcAft>
             </a:pPr>
             <a:r>
-              <a:rPr sz="1450" b="0">
+              <a:rPr sz="1700" b="0">
                 <a:solidFill>
                   <a:srgbClr val="1C222B"/>
                 </a:solidFill>
                 <a:latin typeface="Helvetica Neue"/>
               </a:rPr>
-              <a:t>Cost: every head scores every pair of tokens, N x N. With our 256 tokens that is 65,536 scores per head per block. If every pixel were a token it would be 1,024 x 1,024 = 1,048,576. That is why the image is cut into 2 x 2 patches (next).</a:t>
+              <a:t>3.  Few built-in assumptions, so it keeps improving with more data. A convolution assumes nearby pixels matter most, which helps when data is scarce. Attention must learn even which patches are neighbours (the position table), so it needs more data, but given a lot of data and a bigger model it keeps getting better.</a:t>
+            </a:r>
+          </a:p>
+        </p:txBody>
+      </p:sp>
+      <p:sp>
+        <p:nvSpPr>
+          <p:cNvPr id="8" name="TextBox 7"/>
+          <p:cNvSpPr txBox="1"/>
+          <p:nvPr/>
+        </p:nvSpPr>
+        <p:spPr>
+          <a:xfrm>
+            <a:off x="777240" y="4456556"/>
+            <a:ext cx="10637215" cy="457200"/>
+          </a:xfrm>
+          <a:prstGeom prst="rect">
+            <a:avLst/>
+          </a:prstGeom>
+          <a:noFill/>
+        </p:spPr>
+        <p:txBody>
+          <a:bodyPr wrap="square">
+            <a:spAutoFit/>
+          </a:bodyPr>
+          <a:lstStyle/>
+          <a:p>
+            <a:pPr algn="l">
+              <a:lnSpc>
+                <a:spcPct val="115000"/>
+              </a:lnSpc>
+              <a:spcAft>
+                <a:spcPts val="600"/>
+              </a:spcAft>
+            </a:pPr>
+            <a:r>
+              <a:rPr sz="1700" b="0">
+                <a:solidFill>
+                  <a:srgbClr val="1C222B"/>
+                </a:solidFill>
+                <a:latin typeface="Helvetica Neue"/>
+              </a:rPr>
+              <a:t>4.  One design for every kind of input. Words, image patches and sound all become tokens, and tokens of different kinds can attend to each other: image patches can look at the words of a prompt.</a:t>
+            </a:r>
+          </a:p>
+        </p:txBody>
+      </p:sp>
+      <p:sp>
+        <p:nvSpPr>
+          <p:cNvPr id="9" name="TextBox 8"/>
+          <p:cNvSpPr txBox="1"/>
+          <p:nvPr/>
+        </p:nvSpPr>
+        <p:spPr>
+          <a:xfrm>
+            <a:off x="777240" y="5099430"/>
+            <a:ext cx="10637215" cy="457200"/>
+          </a:xfrm>
+          <a:prstGeom prst="rect">
+            <a:avLst/>
+          </a:prstGeom>
+          <a:noFill/>
+        </p:spPr>
+        <p:txBody>
+          <a:bodyPr wrap="square">
+            <a:spAutoFit/>
+          </a:bodyPr>
+          <a:lstStyle/>
+          <a:p>
+            <a:pPr algn="l">
+              <a:lnSpc>
+                <a:spcPct val="115000"/>
+              </a:lnSpc>
+              <a:spcAft>
+                <a:spcPts val="600"/>
+              </a:spcAft>
+            </a:pPr>
+            <a:r>
+              <a:rPr sz="1700" b="0">
+                <a:solidFill>
+                  <a:srgbClr val="1C222B"/>
+                </a:solidFill>
+                <a:latin typeface="Helvetica Neue"/>
+              </a:rPr>
+              <a:t>5.  Mostly large matrix multiplications, which GPUs are built for.</a:t>
+            </a:r>
+          </a:p>
+        </p:txBody>
+      </p:sp>
+      <p:sp>
+        <p:nvSpPr>
+          <p:cNvPr id="10" name="TextBox 9"/>
+          <p:cNvSpPr txBox="1"/>
+          <p:nvPr/>
+        </p:nvSpPr>
+        <p:spPr>
+          <a:xfrm>
+            <a:off x="777240" y="5494018"/>
+            <a:ext cx="10637215" cy="457200"/>
+          </a:xfrm>
+          <a:prstGeom prst="rect">
+            <a:avLst/>
+          </a:prstGeom>
+          <a:noFill/>
+        </p:spPr>
+        <p:txBody>
+          <a:bodyPr wrap="square">
+            <a:spAutoFit/>
+          </a:bodyPr>
+          <a:lstStyle/>
+          <a:p>
+            <a:pPr algn="l">
+              <a:lnSpc>
+                <a:spcPct val="115000"/>
+              </a:lnSpc>
+              <a:spcAft>
+                <a:spcPts val="600"/>
+              </a:spcAft>
+            </a:pPr>
+            <a:r>
+              <a:rPr sz="1500" b="0">
+                <a:solidFill>
+                  <a:srgbClr val="6B7582"/>
+                </a:solidFill>
+                <a:latin typeface="Helvetica Neue"/>
+              </a:rPr>
+              <a:t>The price: every token is scored against every token. Our 256 tokens give a 256 x 256 table of 65,536 scores; one token per pixel would give 1,024 x 1,024 = 1,048,576. That is why the image is cut into 2 x 2 patches. On a dataset as small as ours, point 3 works against it: see the results.</a:t>
             </a:r>
           </a:p>
         </p:txBody>
@@ -6021,7 +6150,7 @@
                 </a:solidFill>
                 <a:latin typeface="Helvetica Neue"/>
               </a:rPr>
-              <a:t>Attention: the tokens exchange information (previous slides).   MLP: two Linear layers with a GELU between them, applied to each token on its own, the same weights for all tokens.</a:t>
+              <a:t>Attention: the tokens exchange information (attention slides).   MLP: two Linear layers with a GELU between them, applied to each token on its own, the same weights for all tokens.</a:t>
             </a:r>
           </a:p>
           <a:p>
@@ -6512,7 +6641,7 @@
                 </a:solidFill>
                 <a:latin typeface="Helvetica Neue"/>
               </a:rPr>
-              <a:t>Tokens in, tokens out: the size never changes</a:t>
+              <a:t>Image in, image out: tokens never change order</a:t>
             </a:r>
           </a:p>
         </p:txBody>
@@ -6623,7 +6752,7 @@
                 </a:solidFill>
                 <a:latin typeface="Helvetica Neue"/>
               </a:rPr>
-              <a:t>The U-Net shrinks the image to 4 x 4 to see far, then grows it back with skips. The transformer keeps all 256 patches at full detail in every block; attention lets any patch use any other patch directly.</a:t>
+              <a:t>Row i is always patch i: no block reorders the tokens. So at the end, Linear 176 -&gt; 4 turns each token into the predicted noise for its own 2 x 2 pixels, and each patch goes back to its place (token 74: grid row 4, column 10, so pixel rows 8-9, columns 20-21). Unlike the U-Net, nothing shrinks: all 256 patches stay at full detail in every block.</a:t>
             </a:r>
           </a:p>
         </p:txBody>
@@ -6698,7 +6827,7 @@
                 </a:solidFill>
                 <a:latin typeface="Helvetica Neue"/>
               </a:rPr>
-              <a:t>PART 2: HOW T AND Y GET IN</a:t>
+              <a:t>PART 2: THE MODEL</a:t>
             </a:r>
           </a:p>
         </p:txBody>
@@ -6740,7 +6869,7 @@
                 </a:solidFill>
                 <a:latin typeface="Helvetica Neue"/>
               </a:rPr>
-              <a:t>e scales, shifts and gates every block</a:t>
+              <a:t>The position table: a learned address for each patch</a:t>
             </a:r>
           </a:p>
         </p:txBody>
@@ -6792,7 +6921,7 @@
       </p:sp>
       <p:pic>
         <p:nvPicPr>
-          <p:cNvPr id="5" name="Picture 4" descr="eq10.png"/>
+          <p:cNvPr id="5" name="Picture 4" descr="position.png"/>
           <p:cNvPicPr>
             <a:picLocks noChangeAspect="1"/>
           </p:cNvPicPr>
@@ -6806,48 +6935,24 @@
         </p:blipFill>
         <p:spPr>
           <a:xfrm>
-            <a:off x="2512923" y="1691640"/>
-            <a:ext cx="7165848" cy="377952"/>
+            <a:off x="1062648" y="1691640"/>
+            <a:ext cx="10066398" cy="3657600"/>
           </a:xfrm>
           <a:prstGeom prst="rect">
             <a:avLst/>
           </a:prstGeom>
         </p:spPr>
       </p:pic>
-      <p:pic>
-        <p:nvPicPr>
-          <p:cNvPr id="6" name="Picture 5" descr="dit_block.png"/>
-          <p:cNvPicPr>
-            <a:picLocks noChangeAspect="1"/>
-          </p:cNvPicPr>
-          <p:nvPr/>
-        </p:nvPicPr>
-        <p:blipFill>
-          <a:blip r:embed="rId3"/>
-          <a:stretch>
-            <a:fillRect/>
-          </a:stretch>
-        </p:blipFill>
-        <p:spPr>
-          <a:xfrm>
-            <a:off x="1505602" y="2423160"/>
-            <a:ext cx="9180490" cy="2971800"/>
-          </a:xfrm>
-          <a:prstGeom prst="rect">
-            <a:avLst/>
-          </a:prstGeom>
-        </p:spPr>
-      </p:pic>
-      <p:sp>
-        <p:nvSpPr>
-          <p:cNvPr id="7" name="TextBox 6"/>
+      <p:sp>
+        <p:nvSpPr>
+          <p:cNvPr id="6" name="TextBox 5"/>
           <p:cNvSpPr txBox="1"/>
           <p:nvPr/>
         </p:nvSpPr>
         <p:spPr>
           <a:xfrm>
-            <a:off x="777240" y="5440680"/>
-            <a:ext cx="10637215" cy="960120"/>
+            <a:off x="777240" y="5897880"/>
+            <a:ext cx="10637215" cy="548640"/>
           </a:xfrm>
           <a:prstGeom prst="rect">
             <a:avLst/>
@@ -6860,41 +6965,22 @@
           </a:bodyPr>
           <a:lstStyle/>
           <a:p>
-            <a:pPr algn="l">
-              <a:lnSpc>
-                <a:spcPct val="115000"/>
-              </a:lnSpc>
-              <a:spcAft>
-                <a:spcPts val="600"/>
-              </a:spcAft>
-            </a:pPr>
-            <a:r>
-              <a:rPr sz="1350" b="0">
-                <a:solidFill>
-                  <a:srgbClr val="1C222B"/>
+            <a:pPr algn="ctr">
+              <a:lnSpc>
+                <a:spcPct val="100000"/>
+              </a:lnSpc>
+              <a:spcAft>
+                <a:spcPts val="600"/>
+              </a:spcAft>
+            </a:pPr>
+            <a:r>
+              <a:rPr sz="1400" b="0">
+                <a:solidFill>
+                  <a:srgbClr val="6B7582"/>
                 </a:solidFill>
                 <a:latin typeface="Helvetica Neue"/>
               </a:rPr>
-              <a:t>The one change to the block on the previous slides.   Circled dot: multiply number by number.   shift, scale, gate: made from e by one learned Linear per block.</a:t>
-            </a:r>
-          </a:p>
-          <a:p>
-            <a:pPr algn="l">
-              <a:lnSpc>
-                <a:spcPct val="115000"/>
-              </a:lnSpc>
-              <a:spcAft>
-                <a:spcPts val="600"/>
-              </a:spcAft>
-            </a:pPr>
-            <a:r>
-              <a:rPr sz="1350" b="0">
-                <a:solidFill>
-                  <a:srgbClr val="1C222B"/>
-                </a:solidFill>
-                <a:latin typeface="Helvetica Neue"/>
-              </a:rPr>
-              <a:t>Part 1's U-Net block only ADDS e (a shift). Here e also scales, and gates how much each half changes the tokens. The gates start at 0, so every block starts as 'do nothing' and training switches it on. This is the DiT paper's recipe (Peebles &amp; Xie, 2023), which beat adding e.</a:t>
+              <a:t>Attention compares only what tokens contain, never where they sit. A and B contain the same 4 numbers, so without the table they would be the same token. Adding row 17 vs row 218 makes them differ. Nobody told the table which patches are neighbours: after training, rows of neighbouring patches have similarity 0.76 on average, rows 6 or more grid steps apart 0.08.</a:t>
             </a:r>
           </a:p>
         </p:txBody>
@@ -6969,7 +7055,7 @@
                 </a:solidFill>
                 <a:latin typeface="Helvetica Neue"/>
               </a:rPr>
-              <a:t>PART 2: ATTENTION IN THE TRAINED MODEL</a:t>
+              <a:t>PART 2: THE COST</a:t>
             </a:r>
           </a:p>
         </p:txBody>
@@ -7011,7 +7097,7 @@
                 </a:solidFill>
                 <a:latin typeface="Helvetica Neue"/>
               </a:rPr>
-              <a:t>Where one patch looks</a:t>
+              <a:t>Same parameters, not the same compute</a:t>
             </a:r>
           </a:p>
         </p:txBody>
@@ -7061,30 +7147,40 @@
           </a:p>
         </p:txBody>
       </p:sp>
-      <p:pic>
-        <p:nvPicPr>
-          <p:cNvPr id="5" name="Picture 4" descr="attn.png"/>
-          <p:cNvPicPr>
-            <a:picLocks noChangeAspect="1"/>
-          </p:cNvPicPr>
-          <p:nvPr/>
-        </p:nvPicPr>
-        <p:blipFill>
-          <a:blip r:embed="rId2"/>
-          <a:stretch>
-            <a:fillRect/>
-          </a:stretch>
-        </p:blipFill>
-        <p:spPr>
-          <a:xfrm>
-            <a:off x="1997881" y="1737360"/>
-            <a:ext cx="8195933" cy="3840480"/>
-          </a:xfrm>
-          <a:prstGeom prst="rect">
-            <a:avLst/>
-          </a:prstGeom>
-        </p:spPr>
-      </p:pic>
+      <p:sp>
+        <p:nvSpPr>
+          <p:cNvPr id="5" name="TextBox 4"/>
+          <p:cNvSpPr txBox="1"/>
+          <p:nvPr/>
+        </p:nvSpPr>
+        <p:spPr>
+          <a:xfrm>
+            <a:off x="777240" y="1874519"/>
+            <a:ext cx="4875390" cy="365760"/>
+          </a:xfrm>
+          <a:prstGeom prst="rect">
+            <a:avLst/>
+          </a:prstGeom>
+          <a:noFill/>
+        </p:spPr>
+        <p:txBody>
+          <a:bodyPr wrap="square">
+            <a:spAutoFit/>
+          </a:bodyPr>
+          <a:lstStyle/>
+          <a:p>
+            <a:pPr algn="l">
+              <a:lnSpc>
+                <a:spcPct val="100000"/>
+              </a:lnSpc>
+              <a:spcAft>
+                <a:spcPts val="600"/>
+              </a:spcAft>
+            </a:pPr>
+            <a:endParaRPr/>
+          </a:p>
+        </p:txBody>
+      </p:sp>
       <p:sp>
         <p:nvSpPr>
           <p:cNvPr id="6" name="TextBox 5"/>
@@ -7093,8 +7189,8 @@
         </p:nvSpPr>
         <p:spPr>
           <a:xfrm>
-            <a:off x="777240" y="5897880"/>
-            <a:ext cx="10637215" cy="548640"/>
+            <a:off x="5652630" y="1874519"/>
+            <a:ext cx="2659303" cy="365760"/>
           </a:xfrm>
           <a:prstGeom prst="rect">
             <a:avLst/>
@@ -7107,7 +7203,7 @@
           </a:bodyPr>
           <a:lstStyle/>
           <a:p>
-            <a:pPr algn="ctr">
+            <a:pPr algn="l">
               <a:lnSpc>
                 <a:spcPct val="100000"/>
               </a:lnSpc>
@@ -7116,13 +7212,646 @@
               </a:spcAft>
             </a:pPr>
             <a:r>
+              <a:rPr sz="1300" b="1">
+                <a:solidFill>
+                  <a:srgbClr val="6B7582"/>
+                </a:solidFill>
+                <a:latin typeface="Helvetica Neue"/>
+              </a:rPr>
+              <a:t>U-Net (Part 1)</a:t>
+            </a:r>
+          </a:p>
+        </p:txBody>
+      </p:sp>
+      <p:sp>
+        <p:nvSpPr>
+          <p:cNvPr id="7" name="TextBox 6"/>
+          <p:cNvSpPr txBox="1"/>
+          <p:nvPr/>
+        </p:nvSpPr>
+        <p:spPr>
+          <a:xfrm>
+            <a:off x="8311933" y="1874519"/>
+            <a:ext cx="3102521" cy="365760"/>
+          </a:xfrm>
+          <a:prstGeom prst="rect">
+            <a:avLst/>
+          </a:prstGeom>
+          <a:noFill/>
+        </p:spPr>
+        <p:txBody>
+          <a:bodyPr wrap="square">
+            <a:spAutoFit/>
+          </a:bodyPr>
+          <a:lstStyle/>
+          <a:p>
+            <a:pPr algn="l">
+              <a:lnSpc>
+                <a:spcPct val="100000"/>
+              </a:lnSpc>
+              <a:spcAft>
+                <a:spcPts val="600"/>
+              </a:spcAft>
+            </a:pPr>
+            <a:r>
+              <a:rPr sz="1300" b="1">
+                <a:solidFill>
+                  <a:srgbClr val="6B7582"/>
+                </a:solidFill>
+                <a:latin typeface="Helvetica Neue"/>
+              </a:rPr>
+              <a:t>transformer (Part 2)</a:t>
+            </a:r>
+          </a:p>
+        </p:txBody>
+      </p:sp>
+      <p:sp>
+        <p:nvSpPr>
+          <p:cNvPr id="8" name="Rectangle 7"/>
+          <p:cNvSpPr/>
+          <p:nvPr/>
+        </p:nvSpPr>
+        <p:spPr>
+          <a:xfrm>
+            <a:off x="777240" y="2285999"/>
+            <a:ext cx="10637215" cy="15240"/>
+          </a:xfrm>
+          <a:prstGeom prst="rect">
+            <a:avLst/>
+          </a:prstGeom>
+          <a:solidFill>
+            <a:srgbClr val="D8D3CB"/>
+          </a:solidFill>
+          <a:ln>
+            <a:noFill/>
+          </a:ln>
+          <a:effectLst/>
+        </p:spPr>
+        <p:style>
+          <a:lnRef idx="1">
+            <a:schemeClr val="accent1"/>
+          </a:lnRef>
+          <a:fillRef idx="3">
+            <a:schemeClr val="accent1"/>
+          </a:fillRef>
+          <a:effectRef idx="2">
+            <a:schemeClr val="accent1"/>
+          </a:effectRef>
+          <a:fontRef idx="minor">
+            <a:schemeClr val="lt1"/>
+          </a:fontRef>
+        </p:style>
+        <p:txBody>
+          <a:bodyPr rtlCol="0" anchor="ctr"/>
+          <a:lstStyle/>
+          <a:p>
+            <a:pPr algn="ctr"/>
+            <a:endParaRPr/>
+          </a:p>
+        </p:txBody>
+      </p:sp>
+      <p:sp>
+        <p:nvSpPr>
+          <p:cNvPr id="9" name="TextBox 8"/>
+          <p:cNvSpPr txBox="1"/>
+          <p:nvPr/>
+        </p:nvSpPr>
+        <p:spPr>
+          <a:xfrm>
+            <a:off x="777240" y="2395726"/>
+            <a:ext cx="4875390" cy="365760"/>
+          </a:xfrm>
+          <a:prstGeom prst="rect">
+            <a:avLst/>
+          </a:prstGeom>
+          <a:noFill/>
+        </p:spPr>
+        <p:txBody>
+          <a:bodyPr wrap="square">
+            <a:spAutoFit/>
+          </a:bodyPr>
+          <a:lstStyle/>
+          <a:p>
+            <a:pPr algn="l">
+              <a:lnSpc>
+                <a:spcPct val="100000"/>
+              </a:lnSpc>
+              <a:spcAft>
+                <a:spcPts val="600"/>
+              </a:spcAft>
+            </a:pPr>
+            <a:r>
+              <a:rPr sz="1500" b="0">
+                <a:solidFill>
+                  <a:srgbClr val="1C222B"/>
+                </a:solidFill>
+                <a:latin typeface="Helvetica Neue"/>
+              </a:rPr>
+              <a:t>parameters</a:t>
+            </a:r>
+          </a:p>
+        </p:txBody>
+      </p:sp>
+      <p:sp>
+        <p:nvSpPr>
+          <p:cNvPr id="10" name="TextBox 9"/>
+          <p:cNvSpPr txBox="1"/>
+          <p:nvPr/>
+        </p:nvSpPr>
+        <p:spPr>
+          <a:xfrm>
+            <a:off x="5652630" y="2395726"/>
+            <a:ext cx="2659303" cy="365760"/>
+          </a:xfrm>
+          <a:prstGeom prst="rect">
+            <a:avLst/>
+          </a:prstGeom>
+          <a:noFill/>
+        </p:spPr>
+        <p:txBody>
+          <a:bodyPr wrap="square">
+            <a:spAutoFit/>
+          </a:bodyPr>
+          <a:lstStyle/>
+          <a:p>
+            <a:pPr algn="l">
+              <a:lnSpc>
+                <a:spcPct val="100000"/>
+              </a:lnSpc>
+              <a:spcAft>
+                <a:spcPts val="600"/>
+              </a:spcAft>
+            </a:pPr>
+            <a:r>
+              <a:rPr sz="1500" b="0">
+                <a:solidFill>
+                  <a:srgbClr val="1C222B"/>
+                </a:solidFill>
+                <a:latin typeface="Menlo"/>
+              </a:rPr>
+              <a:t>4,586,449</a:t>
+            </a:r>
+          </a:p>
+        </p:txBody>
+      </p:sp>
+      <p:sp>
+        <p:nvSpPr>
+          <p:cNvPr id="11" name="TextBox 10"/>
+          <p:cNvSpPr txBox="1"/>
+          <p:nvPr/>
+        </p:nvSpPr>
+        <p:spPr>
+          <a:xfrm>
+            <a:off x="8311933" y="2395726"/>
+            <a:ext cx="3102521" cy="365760"/>
+          </a:xfrm>
+          <a:prstGeom prst="rect">
+            <a:avLst/>
+          </a:prstGeom>
+          <a:noFill/>
+        </p:spPr>
+        <p:txBody>
+          <a:bodyPr wrap="square">
+            <a:spAutoFit/>
+          </a:bodyPr>
+          <a:lstStyle/>
+          <a:p>
+            <a:pPr algn="l">
+              <a:lnSpc>
+                <a:spcPct val="100000"/>
+              </a:lnSpc>
+              <a:spcAft>
+                <a:spcPts val="600"/>
+              </a:spcAft>
+            </a:pPr>
+            <a:r>
+              <a:rPr sz="1500" b="0">
+                <a:solidFill>
+                  <a:srgbClr val="1C222B"/>
+                </a:solidFill>
+                <a:latin typeface="Menlo"/>
+              </a:rPr>
+              <a:t>4,654,852</a:t>
+            </a:r>
+          </a:p>
+        </p:txBody>
+      </p:sp>
+      <p:sp>
+        <p:nvSpPr>
+          <p:cNvPr id="12" name="TextBox 11"/>
+          <p:cNvSpPr txBox="1"/>
+          <p:nvPr/>
+        </p:nvSpPr>
+        <p:spPr>
+          <a:xfrm>
+            <a:off x="777240" y="2816350"/>
+            <a:ext cx="4875390" cy="365760"/>
+          </a:xfrm>
+          <a:prstGeom prst="rect">
+            <a:avLst/>
+          </a:prstGeom>
+          <a:noFill/>
+        </p:spPr>
+        <p:txBody>
+          <a:bodyPr wrap="square">
+            <a:spAutoFit/>
+          </a:bodyPr>
+          <a:lstStyle/>
+          <a:p>
+            <a:pPr algn="l">
+              <a:lnSpc>
+                <a:spcPct val="100000"/>
+              </a:lnSpc>
+              <a:spcAft>
+                <a:spcPts val="600"/>
+              </a:spcAft>
+            </a:pPr>
+            <a:r>
+              <a:rPr sz="1500" b="0">
+                <a:solidFill>
+                  <a:srgbClr val="1C222B"/>
+                </a:solidFill>
+                <a:latin typeface="Helvetica Neue"/>
+              </a:rPr>
+              <a:t>compute per image, forward (GFLOPs)</a:t>
+            </a:r>
+          </a:p>
+        </p:txBody>
+      </p:sp>
+      <p:sp>
+        <p:nvSpPr>
+          <p:cNvPr id="13" name="TextBox 12"/>
+          <p:cNvSpPr txBox="1"/>
+          <p:nvPr/>
+        </p:nvSpPr>
+        <p:spPr>
+          <a:xfrm>
+            <a:off x="5652630" y="2816350"/>
+            <a:ext cx="2659303" cy="365760"/>
+          </a:xfrm>
+          <a:prstGeom prst="rect">
+            <a:avLst/>
+          </a:prstGeom>
+          <a:noFill/>
+        </p:spPr>
+        <p:txBody>
+          <a:bodyPr wrap="square">
+            <a:spAutoFit/>
+          </a:bodyPr>
+          <a:lstStyle/>
+          <a:p>
+            <a:pPr algn="l">
+              <a:lnSpc>
+                <a:spcPct val="100000"/>
+              </a:lnSpc>
+              <a:spcAft>
+                <a:spcPts val="600"/>
+              </a:spcAft>
+            </a:pPr>
+            <a:r>
+              <a:rPr sz="1500" b="0">
+                <a:solidFill>
+                  <a:srgbClr val="1C222B"/>
+                </a:solidFill>
+                <a:latin typeface="Menlo"/>
+              </a:rPr>
+              <a:t>0.65</a:t>
+            </a:r>
+          </a:p>
+        </p:txBody>
+      </p:sp>
+      <p:sp>
+        <p:nvSpPr>
+          <p:cNvPr id="14" name="TextBox 13"/>
+          <p:cNvSpPr txBox="1"/>
+          <p:nvPr/>
+        </p:nvSpPr>
+        <p:spPr>
+          <a:xfrm>
+            <a:off x="8311933" y="2816350"/>
+            <a:ext cx="3102521" cy="365760"/>
+          </a:xfrm>
+          <a:prstGeom prst="rect">
+            <a:avLst/>
+          </a:prstGeom>
+          <a:noFill/>
+        </p:spPr>
+        <p:txBody>
+          <a:bodyPr wrap="square">
+            <a:spAutoFit/>
+          </a:bodyPr>
+          <a:lstStyle/>
+          <a:p>
+            <a:pPr algn="l">
+              <a:lnSpc>
+                <a:spcPct val="100000"/>
+              </a:lnSpc>
+              <a:spcAft>
+                <a:spcPts val="600"/>
+              </a:spcAft>
+            </a:pPr>
+            <a:r>
+              <a:rPr sz="1500" b="1">
+                <a:solidFill>
+                  <a:srgbClr val="C2551E"/>
+                </a:solidFill>
+                <a:latin typeface="Menlo"/>
+              </a:rPr>
+              <a:t>1.53</a:t>
+            </a:r>
+          </a:p>
+        </p:txBody>
+      </p:sp>
+      <p:sp>
+        <p:nvSpPr>
+          <p:cNvPr id="15" name="TextBox 14"/>
+          <p:cNvSpPr txBox="1"/>
+          <p:nvPr/>
+        </p:nvSpPr>
+        <p:spPr>
+          <a:xfrm>
+            <a:off x="777240" y="3236974"/>
+            <a:ext cx="4875390" cy="365760"/>
+          </a:xfrm>
+          <a:prstGeom prst="rect">
+            <a:avLst/>
+          </a:prstGeom>
+          <a:noFill/>
+        </p:spPr>
+        <p:txBody>
+          <a:bodyPr wrap="square">
+            <a:spAutoFit/>
+          </a:bodyPr>
+          <a:lstStyle/>
+          <a:p>
+            <a:pPr algn="l">
+              <a:lnSpc>
+                <a:spcPct val="100000"/>
+              </a:lnSpc>
+              <a:spcAft>
+                <a:spcPts val="600"/>
+              </a:spcAft>
+            </a:pPr>
+            <a:r>
+              <a:rPr sz="1500" b="0">
+                <a:solidFill>
+                  <a:srgbClr val="1C222B"/>
+                </a:solidFill>
+                <a:latin typeface="Helvetica Neue"/>
+              </a:rPr>
+              <a:t>seconds per training epoch (average)</a:t>
+            </a:r>
+          </a:p>
+        </p:txBody>
+      </p:sp>
+      <p:sp>
+        <p:nvSpPr>
+          <p:cNvPr id="16" name="TextBox 15"/>
+          <p:cNvSpPr txBox="1"/>
+          <p:nvPr/>
+        </p:nvSpPr>
+        <p:spPr>
+          <a:xfrm>
+            <a:off x="5652630" y="3236974"/>
+            <a:ext cx="2659303" cy="365760"/>
+          </a:xfrm>
+          <a:prstGeom prst="rect">
+            <a:avLst/>
+          </a:prstGeom>
+          <a:noFill/>
+        </p:spPr>
+        <p:txBody>
+          <a:bodyPr wrap="square">
+            <a:spAutoFit/>
+          </a:bodyPr>
+          <a:lstStyle/>
+          <a:p>
+            <a:pPr algn="l">
+              <a:lnSpc>
+                <a:spcPct val="100000"/>
+              </a:lnSpc>
+              <a:spcAft>
+                <a:spcPts val="600"/>
+              </a:spcAft>
+            </a:pPr>
+            <a:r>
+              <a:rPr sz="1500" b="0">
+                <a:solidFill>
+                  <a:srgbClr val="1C222B"/>
+                </a:solidFill>
+                <a:latin typeface="Menlo"/>
+              </a:rPr>
+              <a:t>96</a:t>
+            </a:r>
+          </a:p>
+        </p:txBody>
+      </p:sp>
+      <p:sp>
+        <p:nvSpPr>
+          <p:cNvPr id="17" name="TextBox 16"/>
+          <p:cNvSpPr txBox="1"/>
+          <p:nvPr/>
+        </p:nvSpPr>
+        <p:spPr>
+          <a:xfrm>
+            <a:off x="8311933" y="3236974"/>
+            <a:ext cx="3102521" cy="365760"/>
+          </a:xfrm>
+          <a:prstGeom prst="rect">
+            <a:avLst/>
+          </a:prstGeom>
+          <a:noFill/>
+        </p:spPr>
+        <p:txBody>
+          <a:bodyPr wrap="square">
+            <a:spAutoFit/>
+          </a:bodyPr>
+          <a:lstStyle/>
+          <a:p>
+            <a:pPr algn="l">
+              <a:lnSpc>
+                <a:spcPct val="100000"/>
+              </a:lnSpc>
+              <a:spcAft>
+                <a:spcPts val="600"/>
+              </a:spcAft>
+            </a:pPr>
+            <a:r>
+              <a:rPr sz="1500" b="1">
+                <a:solidFill>
+                  <a:srgbClr val="C2551E"/>
+                </a:solidFill>
+                <a:latin typeface="Menlo"/>
+              </a:rPr>
+              <a:t>413</a:t>
+            </a:r>
+          </a:p>
+        </p:txBody>
+      </p:sp>
+      <p:sp>
+        <p:nvSpPr>
+          <p:cNvPr id="18" name="TextBox 17"/>
+          <p:cNvSpPr txBox="1"/>
+          <p:nvPr/>
+        </p:nvSpPr>
+        <p:spPr>
+          <a:xfrm>
+            <a:off x="777240" y="3657598"/>
+            <a:ext cx="4875390" cy="365760"/>
+          </a:xfrm>
+          <a:prstGeom prst="rect">
+            <a:avLst/>
+          </a:prstGeom>
+          <a:noFill/>
+        </p:spPr>
+        <p:txBody>
+          <a:bodyPr wrap="square">
+            <a:spAutoFit/>
+          </a:bodyPr>
+          <a:lstStyle/>
+          <a:p>
+            <a:pPr algn="l">
+              <a:lnSpc>
+                <a:spcPct val="100000"/>
+              </a:lnSpc>
+              <a:spcAft>
+                <a:spcPts val="600"/>
+              </a:spcAft>
+            </a:pPr>
+            <a:r>
+              <a:rPr sz="1500" b="0">
+                <a:solidFill>
+                  <a:srgbClr val="1C222B"/>
+                </a:solidFill>
+                <a:latin typeface="Helvetica Neue"/>
+              </a:rPr>
+              <a:t>minutes for 20 epochs</a:t>
+            </a:r>
+          </a:p>
+        </p:txBody>
+      </p:sp>
+      <p:sp>
+        <p:nvSpPr>
+          <p:cNvPr id="19" name="TextBox 18"/>
+          <p:cNvSpPr txBox="1"/>
+          <p:nvPr/>
+        </p:nvSpPr>
+        <p:spPr>
+          <a:xfrm>
+            <a:off x="5652630" y="3657598"/>
+            <a:ext cx="2659303" cy="365760"/>
+          </a:xfrm>
+          <a:prstGeom prst="rect">
+            <a:avLst/>
+          </a:prstGeom>
+          <a:noFill/>
+        </p:spPr>
+        <p:txBody>
+          <a:bodyPr wrap="square">
+            <a:spAutoFit/>
+          </a:bodyPr>
+          <a:lstStyle/>
+          <a:p>
+            <a:pPr algn="l">
+              <a:lnSpc>
+                <a:spcPct val="100000"/>
+              </a:lnSpc>
+              <a:spcAft>
+                <a:spcPts val="600"/>
+              </a:spcAft>
+            </a:pPr>
+            <a:r>
+              <a:rPr sz="1500" b="0">
+                <a:solidFill>
+                  <a:srgbClr val="1C222B"/>
+                </a:solidFill>
+                <a:latin typeface="Menlo"/>
+              </a:rPr>
+              <a:t>32</a:t>
+            </a:r>
+          </a:p>
+        </p:txBody>
+      </p:sp>
+      <p:sp>
+        <p:nvSpPr>
+          <p:cNvPr id="20" name="TextBox 19"/>
+          <p:cNvSpPr txBox="1"/>
+          <p:nvPr/>
+        </p:nvSpPr>
+        <p:spPr>
+          <a:xfrm>
+            <a:off x="8311933" y="3657598"/>
+            <a:ext cx="3102521" cy="365760"/>
+          </a:xfrm>
+          <a:prstGeom prst="rect">
+            <a:avLst/>
+          </a:prstGeom>
+          <a:noFill/>
+        </p:spPr>
+        <p:txBody>
+          <a:bodyPr wrap="square">
+            <a:spAutoFit/>
+          </a:bodyPr>
+          <a:lstStyle/>
+          <a:p>
+            <a:pPr algn="l">
+              <a:lnSpc>
+                <a:spcPct val="100000"/>
+              </a:lnSpc>
+              <a:spcAft>
+                <a:spcPts val="600"/>
+              </a:spcAft>
+            </a:pPr>
+            <a:r>
+              <a:rPr sz="1500" b="1">
+                <a:solidFill>
+                  <a:srgbClr val="C2551E"/>
+                </a:solidFill>
+                <a:latin typeface="Menlo"/>
+              </a:rPr>
+              <a:t>138</a:t>
+            </a:r>
+          </a:p>
+        </p:txBody>
+      </p:sp>
+      <p:sp>
+        <p:nvSpPr>
+          <p:cNvPr id="21" name="TextBox 20"/>
+          <p:cNvSpPr txBox="1"/>
+          <p:nvPr/>
+        </p:nvSpPr>
+        <p:spPr>
+          <a:xfrm>
+            <a:off x="777240" y="5806440"/>
+            <a:ext cx="10637215" cy="640080"/>
+          </a:xfrm>
+          <a:prstGeom prst="rect">
+            <a:avLst/>
+          </a:prstGeom>
+          <a:noFill/>
+        </p:spPr>
+        <p:txBody>
+          <a:bodyPr wrap="square">
+            <a:spAutoFit/>
+          </a:bodyPr>
+          <a:lstStyle/>
+          <a:p>
+            <a:pPr algn="l">
+              <a:lnSpc>
+                <a:spcPct val="115000"/>
+              </a:lnSpc>
+              <a:spcAft>
+                <a:spcPts val="600"/>
+              </a:spcAft>
+            </a:pPr>
+            <a:r>
               <a:rPr sz="1400" b="0">
                 <a:solidFill>
                   <a:srgbClr val="6B7582"/>
                 </a:solidFill>
                 <a:latin typeface="Helvetica Neue"/>
               </a:rPr>
-              <a:t>Real attention weights from Part 2's checkpoint (after epoch 7). Left: the query patch (orange box). Right: how much weight it gives every patch, one map per head.</a:t>
+              <a:t>GFLOPs: billions of multiplications and additions to process one image once, counted by PyTorch. Every transformer weight is used on all 256 tokens; the U-Net's widest layers only run on 4 x 4 = 16 positions. Attention is also slower per GFLOP than convolution on this Mac's GPU. Transformer epoch 17: the Mac went to sleep mid-epoch, so its time is the average of the other epochs.</a:t>
             </a:r>
           </a:p>
         </p:txBody>
@@ -7197,7 +7926,7 @@
                 </a:solidFill>
                 <a:latin typeface="Helvetica Neue"/>
               </a:rPr>
-              <a:t>PART 2: THE COST</a:t>
+              <a:t>PART 2: RESULTS</a:t>
             </a:r>
           </a:p>
         </p:txBody>
@@ -7239,7 +7968,7 @@
                 </a:solidFill>
                 <a:latin typeface="Helvetica Neue"/>
               </a:rPr>
-              <a:t>Same parameters, not the same compute</a:t>
+              <a:t>Training loss: per epoch, and per minute</a:t>
             </a:r>
           </a:p>
         </p:txBody>
@@ -7289,16 +8018,40 @@
           </a:p>
         </p:txBody>
       </p:sp>
-      <p:sp>
-        <p:nvSpPr>
-          <p:cNvPr id="5" name="TextBox 4"/>
+      <p:pic>
+        <p:nvPicPr>
+          <p:cNvPr id="5" name="Picture 4" descr="loss_compare.png"/>
+          <p:cNvPicPr>
+            <a:picLocks noChangeAspect="1"/>
+          </p:cNvPicPr>
+          <p:nvPr/>
+        </p:nvPicPr>
+        <p:blipFill>
+          <a:blip r:embed="rId2"/>
+          <a:stretch>
+            <a:fillRect/>
+          </a:stretch>
+        </p:blipFill>
+        <p:spPr>
+          <a:xfrm>
+            <a:off x="1265699" y="1783080"/>
+            <a:ext cx="9660297" cy="3566160"/>
+          </a:xfrm>
+          <a:prstGeom prst="rect">
+            <a:avLst/>
+          </a:prstGeom>
+        </p:spPr>
+      </p:pic>
+      <p:sp>
+        <p:nvSpPr>
+          <p:cNvPr id="6" name="TextBox 5"/>
           <p:cNvSpPr txBox="1"/>
           <p:nvPr/>
         </p:nvSpPr>
         <p:spPr>
           <a:xfrm>
-            <a:off x="777240" y="1874519"/>
-            <a:ext cx="4875390" cy="365760"/>
+            <a:off x="777240" y="5897880"/>
+            <a:ext cx="10637215" cy="548640"/>
           </a:xfrm>
           <a:prstGeom prst="rect">
             <a:avLst/>
@@ -7311,7 +8064,7 @@
           </a:bodyPr>
           <a:lstStyle/>
           <a:p>
-            <a:pPr algn="l">
+            <a:pPr algn="ctr">
               <a:lnSpc>
                 <a:spcPct val="100000"/>
               </a:lnSpc>
@@ -7319,681 +8072,14 @@
                 <a:spcPts val="600"/>
               </a:spcAft>
             </a:pPr>
-            <a:endParaRPr/>
-          </a:p>
-        </p:txBody>
-      </p:sp>
-      <p:sp>
-        <p:nvSpPr>
-          <p:cNvPr id="6" name="TextBox 5"/>
-          <p:cNvSpPr txBox="1"/>
-          <p:nvPr/>
-        </p:nvSpPr>
-        <p:spPr>
-          <a:xfrm>
-            <a:off x="5652630" y="1874519"/>
-            <a:ext cx="2659303" cy="365760"/>
-          </a:xfrm>
-          <a:prstGeom prst="rect">
-            <a:avLst/>
-          </a:prstGeom>
-          <a:noFill/>
-        </p:spPr>
-        <p:txBody>
-          <a:bodyPr wrap="square">
-            <a:spAutoFit/>
-          </a:bodyPr>
-          <a:lstStyle/>
-          <a:p>
-            <a:pPr algn="l">
-              <a:lnSpc>
-                <a:spcPct val="100000"/>
-              </a:lnSpc>
-              <a:spcAft>
-                <a:spcPts val="600"/>
-              </a:spcAft>
-            </a:pPr>
-            <a:r>
-              <a:rPr sz="1300" b="1">
+            <a:r>
+              <a:rPr sz="1400" b="0">
                 <a:solidFill>
                   <a:srgbClr val="6B7582"/>
                 </a:solidFill>
                 <a:latin typeface="Helvetica Neue"/>
               </a:rPr>
-              <a:t>U-Net (Part 1)</a:t>
-            </a:r>
-          </a:p>
-        </p:txBody>
-      </p:sp>
-      <p:sp>
-        <p:nvSpPr>
-          <p:cNvPr id="7" name="TextBox 6"/>
-          <p:cNvSpPr txBox="1"/>
-          <p:nvPr/>
-        </p:nvSpPr>
-        <p:spPr>
-          <a:xfrm>
-            <a:off x="8311933" y="1874519"/>
-            <a:ext cx="3102521" cy="365760"/>
-          </a:xfrm>
-          <a:prstGeom prst="rect">
-            <a:avLst/>
-          </a:prstGeom>
-          <a:noFill/>
-        </p:spPr>
-        <p:txBody>
-          <a:bodyPr wrap="square">
-            <a:spAutoFit/>
-          </a:bodyPr>
-          <a:lstStyle/>
-          <a:p>
-            <a:pPr algn="l">
-              <a:lnSpc>
-                <a:spcPct val="100000"/>
-              </a:lnSpc>
-              <a:spcAft>
-                <a:spcPts val="600"/>
-              </a:spcAft>
-            </a:pPr>
-            <a:r>
-              <a:rPr sz="1300" b="1">
-                <a:solidFill>
-                  <a:srgbClr val="6B7582"/>
-                </a:solidFill>
-                <a:latin typeface="Helvetica Neue"/>
-              </a:rPr>
-              <a:t>transformer (Part 2)</a:t>
-            </a:r>
-          </a:p>
-        </p:txBody>
-      </p:sp>
-      <p:sp>
-        <p:nvSpPr>
-          <p:cNvPr id="8" name="Rectangle 7"/>
-          <p:cNvSpPr/>
-          <p:nvPr/>
-        </p:nvSpPr>
-        <p:spPr>
-          <a:xfrm>
-            <a:off x="777240" y="2285999"/>
-            <a:ext cx="10637215" cy="15240"/>
-          </a:xfrm>
-          <a:prstGeom prst="rect">
-            <a:avLst/>
-          </a:prstGeom>
-          <a:solidFill>
-            <a:srgbClr val="D8D3CB"/>
-          </a:solidFill>
-          <a:ln>
-            <a:noFill/>
-          </a:ln>
-          <a:effectLst/>
-        </p:spPr>
-        <p:style>
-          <a:lnRef idx="1">
-            <a:schemeClr val="accent1"/>
-          </a:lnRef>
-          <a:fillRef idx="3">
-            <a:schemeClr val="accent1"/>
-          </a:fillRef>
-          <a:effectRef idx="2">
-            <a:schemeClr val="accent1"/>
-          </a:effectRef>
-          <a:fontRef idx="minor">
-            <a:schemeClr val="lt1"/>
-          </a:fontRef>
-        </p:style>
-        <p:txBody>
-          <a:bodyPr rtlCol="0" anchor="ctr"/>
-          <a:lstStyle/>
-          <a:p>
-            <a:pPr algn="ctr"/>
-            <a:endParaRPr/>
-          </a:p>
-        </p:txBody>
-      </p:sp>
-      <p:sp>
-        <p:nvSpPr>
-          <p:cNvPr id="9" name="TextBox 8"/>
-          <p:cNvSpPr txBox="1"/>
-          <p:nvPr/>
-        </p:nvSpPr>
-        <p:spPr>
-          <a:xfrm>
-            <a:off x="777240" y="2395726"/>
-            <a:ext cx="4875390" cy="365760"/>
-          </a:xfrm>
-          <a:prstGeom prst="rect">
-            <a:avLst/>
-          </a:prstGeom>
-          <a:noFill/>
-        </p:spPr>
-        <p:txBody>
-          <a:bodyPr wrap="square">
-            <a:spAutoFit/>
-          </a:bodyPr>
-          <a:lstStyle/>
-          <a:p>
-            <a:pPr algn="l">
-              <a:lnSpc>
-                <a:spcPct val="100000"/>
-              </a:lnSpc>
-              <a:spcAft>
-                <a:spcPts val="600"/>
-              </a:spcAft>
-            </a:pPr>
-            <a:r>
-              <a:rPr sz="1500" b="0">
-                <a:solidFill>
-                  <a:srgbClr val="1C222B"/>
-                </a:solidFill>
-                <a:latin typeface="Helvetica Neue"/>
-              </a:rPr>
-              <a:t>parameters</a:t>
-            </a:r>
-          </a:p>
-        </p:txBody>
-      </p:sp>
-      <p:sp>
-        <p:nvSpPr>
-          <p:cNvPr id="10" name="TextBox 9"/>
-          <p:cNvSpPr txBox="1"/>
-          <p:nvPr/>
-        </p:nvSpPr>
-        <p:spPr>
-          <a:xfrm>
-            <a:off x="5652630" y="2395726"/>
-            <a:ext cx="2659303" cy="365760"/>
-          </a:xfrm>
-          <a:prstGeom prst="rect">
-            <a:avLst/>
-          </a:prstGeom>
-          <a:noFill/>
-        </p:spPr>
-        <p:txBody>
-          <a:bodyPr wrap="square">
-            <a:spAutoFit/>
-          </a:bodyPr>
-          <a:lstStyle/>
-          <a:p>
-            <a:pPr algn="l">
-              <a:lnSpc>
-                <a:spcPct val="100000"/>
-              </a:lnSpc>
-              <a:spcAft>
-                <a:spcPts val="600"/>
-              </a:spcAft>
-            </a:pPr>
-            <a:r>
-              <a:rPr sz="1500" b="0">
-                <a:solidFill>
-                  <a:srgbClr val="1C222B"/>
-                </a:solidFill>
-                <a:latin typeface="Menlo"/>
-              </a:rPr>
-              <a:t>4,586,449</a:t>
-            </a:r>
-          </a:p>
-        </p:txBody>
-      </p:sp>
-      <p:sp>
-        <p:nvSpPr>
-          <p:cNvPr id="11" name="TextBox 10"/>
-          <p:cNvSpPr txBox="1"/>
-          <p:nvPr/>
-        </p:nvSpPr>
-        <p:spPr>
-          <a:xfrm>
-            <a:off x="8311933" y="2395726"/>
-            <a:ext cx="3102521" cy="365760"/>
-          </a:xfrm>
-          <a:prstGeom prst="rect">
-            <a:avLst/>
-          </a:prstGeom>
-          <a:noFill/>
-        </p:spPr>
-        <p:txBody>
-          <a:bodyPr wrap="square">
-            <a:spAutoFit/>
-          </a:bodyPr>
-          <a:lstStyle/>
-          <a:p>
-            <a:pPr algn="l">
-              <a:lnSpc>
-                <a:spcPct val="100000"/>
-              </a:lnSpc>
-              <a:spcAft>
-                <a:spcPts val="600"/>
-              </a:spcAft>
-            </a:pPr>
-            <a:r>
-              <a:rPr sz="1500" b="0">
-                <a:solidFill>
-                  <a:srgbClr val="1C222B"/>
-                </a:solidFill>
-                <a:latin typeface="Menlo"/>
-              </a:rPr>
-              <a:t>4,654,852</a:t>
-            </a:r>
-          </a:p>
-        </p:txBody>
-      </p:sp>
-      <p:sp>
-        <p:nvSpPr>
-          <p:cNvPr id="12" name="TextBox 11"/>
-          <p:cNvSpPr txBox="1"/>
-          <p:nvPr/>
-        </p:nvSpPr>
-        <p:spPr>
-          <a:xfrm>
-            <a:off x="777240" y="2816350"/>
-            <a:ext cx="4875390" cy="365760"/>
-          </a:xfrm>
-          <a:prstGeom prst="rect">
-            <a:avLst/>
-          </a:prstGeom>
-          <a:noFill/>
-        </p:spPr>
-        <p:txBody>
-          <a:bodyPr wrap="square">
-            <a:spAutoFit/>
-          </a:bodyPr>
-          <a:lstStyle/>
-          <a:p>
-            <a:pPr algn="l">
-              <a:lnSpc>
-                <a:spcPct val="100000"/>
-              </a:lnSpc>
-              <a:spcAft>
-                <a:spcPts val="600"/>
-              </a:spcAft>
-            </a:pPr>
-            <a:r>
-              <a:rPr sz="1500" b="0">
-                <a:solidFill>
-                  <a:srgbClr val="1C222B"/>
-                </a:solidFill>
-                <a:latin typeface="Helvetica Neue"/>
-              </a:rPr>
-              <a:t>compute per image, forward (GFLOPs)</a:t>
-            </a:r>
-          </a:p>
-        </p:txBody>
-      </p:sp>
-      <p:sp>
-        <p:nvSpPr>
-          <p:cNvPr id="13" name="TextBox 12"/>
-          <p:cNvSpPr txBox="1"/>
-          <p:nvPr/>
-        </p:nvSpPr>
-        <p:spPr>
-          <a:xfrm>
-            <a:off x="5652630" y="2816350"/>
-            <a:ext cx="2659303" cy="365760"/>
-          </a:xfrm>
-          <a:prstGeom prst="rect">
-            <a:avLst/>
-          </a:prstGeom>
-          <a:noFill/>
-        </p:spPr>
-        <p:txBody>
-          <a:bodyPr wrap="square">
-            <a:spAutoFit/>
-          </a:bodyPr>
-          <a:lstStyle/>
-          <a:p>
-            <a:pPr algn="l">
-              <a:lnSpc>
-                <a:spcPct val="100000"/>
-              </a:lnSpc>
-              <a:spcAft>
-                <a:spcPts val="600"/>
-              </a:spcAft>
-            </a:pPr>
-            <a:r>
-              <a:rPr sz="1500" b="0">
-                <a:solidFill>
-                  <a:srgbClr val="1C222B"/>
-                </a:solidFill>
-                <a:latin typeface="Menlo"/>
-              </a:rPr>
-              <a:t>0.65</a:t>
-            </a:r>
-          </a:p>
-        </p:txBody>
-      </p:sp>
-      <p:sp>
-        <p:nvSpPr>
-          <p:cNvPr id="14" name="TextBox 13"/>
-          <p:cNvSpPr txBox="1"/>
-          <p:nvPr/>
-        </p:nvSpPr>
-        <p:spPr>
-          <a:xfrm>
-            <a:off x="8311933" y="2816350"/>
-            <a:ext cx="3102521" cy="365760"/>
-          </a:xfrm>
-          <a:prstGeom prst="rect">
-            <a:avLst/>
-          </a:prstGeom>
-          <a:noFill/>
-        </p:spPr>
-        <p:txBody>
-          <a:bodyPr wrap="square">
-            <a:spAutoFit/>
-          </a:bodyPr>
-          <a:lstStyle/>
-          <a:p>
-            <a:pPr algn="l">
-              <a:lnSpc>
-                <a:spcPct val="100000"/>
-              </a:lnSpc>
-              <a:spcAft>
-                <a:spcPts val="600"/>
-              </a:spcAft>
-            </a:pPr>
-            <a:r>
-              <a:rPr sz="1500" b="1">
-                <a:solidFill>
-                  <a:srgbClr val="C2551E"/>
-                </a:solidFill>
-                <a:latin typeface="Menlo"/>
-              </a:rPr>
-              <a:t>1.53</a:t>
-            </a:r>
-          </a:p>
-        </p:txBody>
-      </p:sp>
-      <p:sp>
-        <p:nvSpPr>
-          <p:cNvPr id="15" name="TextBox 14"/>
-          <p:cNvSpPr txBox="1"/>
-          <p:nvPr/>
-        </p:nvSpPr>
-        <p:spPr>
-          <a:xfrm>
-            <a:off x="777240" y="3236974"/>
-            <a:ext cx="4875390" cy="365760"/>
-          </a:xfrm>
-          <a:prstGeom prst="rect">
-            <a:avLst/>
-          </a:prstGeom>
-          <a:noFill/>
-        </p:spPr>
-        <p:txBody>
-          <a:bodyPr wrap="square">
-            <a:spAutoFit/>
-          </a:bodyPr>
-          <a:lstStyle/>
-          <a:p>
-            <a:pPr algn="l">
-              <a:lnSpc>
-                <a:spcPct val="100000"/>
-              </a:lnSpc>
-              <a:spcAft>
-                <a:spcPts val="600"/>
-              </a:spcAft>
-            </a:pPr>
-            <a:r>
-              <a:rPr sz="1500" b="0">
-                <a:solidFill>
-                  <a:srgbClr val="1C222B"/>
-                </a:solidFill>
-                <a:latin typeface="Helvetica Neue"/>
-              </a:rPr>
-              <a:t>seconds per training epoch (average)</a:t>
-            </a:r>
-          </a:p>
-        </p:txBody>
-      </p:sp>
-      <p:sp>
-        <p:nvSpPr>
-          <p:cNvPr id="16" name="TextBox 15"/>
-          <p:cNvSpPr txBox="1"/>
-          <p:nvPr/>
-        </p:nvSpPr>
-        <p:spPr>
-          <a:xfrm>
-            <a:off x="5652630" y="3236974"/>
-            <a:ext cx="2659303" cy="365760"/>
-          </a:xfrm>
-          <a:prstGeom prst="rect">
-            <a:avLst/>
-          </a:prstGeom>
-          <a:noFill/>
-        </p:spPr>
-        <p:txBody>
-          <a:bodyPr wrap="square">
-            <a:spAutoFit/>
-          </a:bodyPr>
-          <a:lstStyle/>
-          <a:p>
-            <a:pPr algn="l">
-              <a:lnSpc>
-                <a:spcPct val="100000"/>
-              </a:lnSpc>
-              <a:spcAft>
-                <a:spcPts val="600"/>
-              </a:spcAft>
-            </a:pPr>
-            <a:r>
-              <a:rPr sz="1500" b="0">
-                <a:solidFill>
-                  <a:srgbClr val="1C222B"/>
-                </a:solidFill>
-                <a:latin typeface="Menlo"/>
-              </a:rPr>
-              <a:t>96</a:t>
-            </a:r>
-          </a:p>
-        </p:txBody>
-      </p:sp>
-      <p:sp>
-        <p:nvSpPr>
-          <p:cNvPr id="17" name="TextBox 16"/>
-          <p:cNvSpPr txBox="1"/>
-          <p:nvPr/>
-        </p:nvSpPr>
-        <p:spPr>
-          <a:xfrm>
-            <a:off x="8311933" y="3236974"/>
-            <a:ext cx="3102521" cy="365760"/>
-          </a:xfrm>
-          <a:prstGeom prst="rect">
-            <a:avLst/>
-          </a:prstGeom>
-          <a:noFill/>
-        </p:spPr>
-        <p:txBody>
-          <a:bodyPr wrap="square">
-            <a:spAutoFit/>
-          </a:bodyPr>
-          <a:lstStyle/>
-          <a:p>
-            <a:pPr algn="l">
-              <a:lnSpc>
-                <a:spcPct val="100000"/>
-              </a:lnSpc>
-              <a:spcAft>
-                <a:spcPts val="600"/>
-              </a:spcAft>
-            </a:pPr>
-            <a:r>
-              <a:rPr sz="1500" b="1">
-                <a:solidFill>
-                  <a:srgbClr val="C2551E"/>
-                </a:solidFill>
-                <a:latin typeface="Menlo"/>
-              </a:rPr>
-              <a:t>414</a:t>
-            </a:r>
-          </a:p>
-        </p:txBody>
-      </p:sp>
-      <p:sp>
-        <p:nvSpPr>
-          <p:cNvPr id="18" name="TextBox 17"/>
-          <p:cNvSpPr txBox="1"/>
-          <p:nvPr/>
-        </p:nvSpPr>
-        <p:spPr>
-          <a:xfrm>
-            <a:off x="777240" y="3657598"/>
-            <a:ext cx="4875390" cy="365760"/>
-          </a:xfrm>
-          <a:prstGeom prst="rect">
-            <a:avLst/>
-          </a:prstGeom>
-          <a:noFill/>
-        </p:spPr>
-        <p:txBody>
-          <a:bodyPr wrap="square">
-            <a:spAutoFit/>
-          </a:bodyPr>
-          <a:lstStyle/>
-          <a:p>
-            <a:pPr algn="l">
-              <a:lnSpc>
-                <a:spcPct val="100000"/>
-              </a:lnSpc>
-              <a:spcAft>
-                <a:spcPts val="600"/>
-              </a:spcAft>
-            </a:pPr>
-            <a:r>
-              <a:rPr sz="1500" b="0">
-                <a:solidFill>
-                  <a:srgbClr val="1C222B"/>
-                </a:solidFill>
-                <a:latin typeface="Helvetica Neue"/>
-              </a:rPr>
-              <a:t>minutes for 20 epochs</a:t>
-            </a:r>
-          </a:p>
-        </p:txBody>
-      </p:sp>
-      <p:sp>
-        <p:nvSpPr>
-          <p:cNvPr id="19" name="TextBox 18"/>
-          <p:cNvSpPr txBox="1"/>
-          <p:nvPr/>
-        </p:nvSpPr>
-        <p:spPr>
-          <a:xfrm>
-            <a:off x="5652630" y="3657598"/>
-            <a:ext cx="2659303" cy="365760"/>
-          </a:xfrm>
-          <a:prstGeom prst="rect">
-            <a:avLst/>
-          </a:prstGeom>
-          <a:noFill/>
-        </p:spPr>
-        <p:txBody>
-          <a:bodyPr wrap="square">
-            <a:spAutoFit/>
-          </a:bodyPr>
-          <a:lstStyle/>
-          <a:p>
-            <a:pPr algn="l">
-              <a:lnSpc>
-                <a:spcPct val="100000"/>
-              </a:lnSpc>
-              <a:spcAft>
-                <a:spcPts val="600"/>
-              </a:spcAft>
-            </a:pPr>
-            <a:r>
-              <a:rPr sz="1500" b="0">
-                <a:solidFill>
-                  <a:srgbClr val="1C222B"/>
-                </a:solidFill>
-                <a:latin typeface="Menlo"/>
-              </a:rPr>
-              <a:t>32</a:t>
-            </a:r>
-          </a:p>
-        </p:txBody>
-      </p:sp>
-      <p:sp>
-        <p:nvSpPr>
-          <p:cNvPr id="20" name="TextBox 19"/>
-          <p:cNvSpPr txBox="1"/>
-          <p:nvPr/>
-        </p:nvSpPr>
-        <p:spPr>
-          <a:xfrm>
-            <a:off x="8311933" y="3657598"/>
-            <a:ext cx="3102521" cy="365760"/>
-          </a:xfrm>
-          <a:prstGeom prst="rect">
-            <a:avLst/>
-          </a:prstGeom>
-          <a:noFill/>
-        </p:spPr>
-        <p:txBody>
-          <a:bodyPr wrap="square">
-            <a:spAutoFit/>
-          </a:bodyPr>
-          <a:lstStyle/>
-          <a:p>
-            <a:pPr algn="l">
-              <a:lnSpc>
-                <a:spcPct val="100000"/>
-              </a:lnSpc>
-              <a:spcAft>
-                <a:spcPts val="600"/>
-              </a:spcAft>
-            </a:pPr>
-            <a:r>
-              <a:rPr sz="1500" b="1">
-                <a:solidFill>
-                  <a:srgbClr val="C2551E"/>
-                </a:solidFill>
-                <a:latin typeface="Menlo"/>
-              </a:rPr>
-              <a:t>138 (projected)</a:t>
-            </a:r>
-          </a:p>
-        </p:txBody>
-      </p:sp>
-      <p:sp>
-        <p:nvSpPr>
-          <p:cNvPr id="21" name="TextBox 20"/>
-          <p:cNvSpPr txBox="1"/>
-          <p:nvPr/>
-        </p:nvSpPr>
-        <p:spPr>
-          <a:xfrm>
-            <a:off x="777240" y="5806440"/>
-            <a:ext cx="10637215" cy="640080"/>
-          </a:xfrm>
-          <a:prstGeom prst="rect">
-            <a:avLst/>
-          </a:prstGeom>
-          <a:noFill/>
-        </p:spPr>
-        <p:txBody>
-          <a:bodyPr wrap="square">
-            <a:spAutoFit/>
-          </a:bodyPr>
-          <a:lstStyle/>
-          <a:p>
-            <a:pPr algn="l">
-              <a:lnSpc>
-                <a:spcPct val="115000"/>
-              </a:lnSpc>
-              <a:spcAft>
-                <a:spcPts val="600"/>
-              </a:spcAft>
-            </a:pPr>
-            <a:r>
-              <a:rPr sz="1400" b="0">
-                <a:solidFill>
-                  <a:srgbClr val="6B7582"/>
-                </a:solidFill>
-                <a:latin typeface="Helvetica Neue"/>
-              </a:rPr>
-              <a:t>GFLOPs: billions of multiplications and additions to process one image once, counted by PyTorch. Every transformer weight is used on all 256 tokens; the U-Net's widest layers only run on 4 x 4 = 16 positions. Attention is also slower per GFLOP than convolution on this Mac's GPU.</a:t>
+              <a:t>Transformer: 20 epochs (stopped after epoch 13, then continued from the saved weights: the small bump at epoch 14), final loss 0.0182. U-Net: 20 epochs, final loss 0.0183. Same data, same loss, same recipe, so the numbers compare directly. Transformer epoch 17: the Mac went to sleep mid-epoch, so its time is the average of the other epochs.</a:t>
             </a:r>
           </a:p>
         </p:txBody>
@@ -8110,7 +8196,7 @@
                 </a:solidFill>
                 <a:latin typeface="Helvetica Neue"/>
               </a:rPr>
-              <a:t>Training loss: per epoch, and per minute</a:t>
+              <a:t>The transformer's digits, epoch by epoch</a:t>
             </a:r>
           </a:p>
         </p:txBody>
@@ -8162,7 +8248,7 @@
       </p:sp>
       <p:pic>
         <p:nvPicPr>
-          <p:cNvPr id="5" name="Picture 4" descr="loss_compare.png"/>
+          <p:cNvPr id="5" name="Picture 4" descr="grids2.png"/>
           <p:cNvPicPr>
             <a:picLocks noChangeAspect="1"/>
           </p:cNvPicPr>
@@ -8176,8 +8262,8 @@
         </p:blipFill>
         <p:spPr>
           <a:xfrm>
-            <a:off x="1250126" y="1783080"/>
-            <a:ext cx="9691442" cy="3566160"/>
+            <a:off x="1404589" y="1783080"/>
+            <a:ext cx="9382516" cy="3749039"/>
           </a:xfrm>
           <a:prstGeom prst="rect">
             <a:avLst/>
@@ -8221,477 +8307,7 @@
                 </a:solidFill>
                 <a:latin typeface="Helvetica Neue"/>
               </a:rPr>
-              <a:t>Transformer: 7 of 20 epochs so far (training still running), final loss 0.0348. U-Net: 20 epochs, final loss 0.0183. Same data, same loss, same recipe, so the numbers compare directly.</a:t>
-            </a:r>
-          </a:p>
-        </p:txBody>
-      </p:sp>
-    </p:spTree>
-  </p:cSld>
-  <p:clrMapOvr>
-    <a:masterClrMapping/>
-  </p:clrMapOvr>
-</p:sld>
-</file>
-
-<file path=ppt/slides/slide25.xml><?xml version="1.0" encoding="utf-8"?>
-<p:sld xmlns:a="http://schemas.openxmlformats.org/drawingml/2006/main" xmlns:r="http://schemas.openxmlformats.org/officeDocument/2006/relationships" xmlns:p="http://schemas.openxmlformats.org/presentationml/2006/main">
-  <p:cSld>
-    <p:bg>
-      <p:bgPr>
-        <a:solidFill>
-          <a:srgbClr val="FAF9F7"/>
-        </a:solidFill>
-        <a:effectLst/>
-      </p:bgPr>
-    </p:bg>
-    <p:spTree>
-      <p:nvGrpSpPr>
-        <p:cNvPr id="1" name=""/>
-        <p:cNvGrpSpPr/>
-        <p:nvPr/>
-      </p:nvGrpSpPr>
-      <p:grpSpPr>
-        <a:xfrm>
-          <a:off x="0" y="0"/>
-          <a:ext cx="0" cy="0"/>
-          <a:chOff x="0" y="0"/>
-          <a:chExt cx="0" cy="0"/>
-        </a:xfrm>
-      </p:grpSpPr>
-      <p:sp>
-        <p:nvSpPr>
-          <p:cNvPr id="2" name="TextBox 1"/>
-          <p:cNvSpPr txBox="1"/>
-          <p:nvPr/>
-        </p:nvSpPr>
-        <p:spPr>
-          <a:xfrm>
-            <a:off x="777240" y="457200"/>
-            <a:ext cx="10637215" cy="320040"/>
-          </a:xfrm>
-          <a:prstGeom prst="rect">
-            <a:avLst/>
-          </a:prstGeom>
-          <a:noFill/>
-        </p:spPr>
-        <p:txBody>
-          <a:bodyPr wrap="square">
-            <a:spAutoFit/>
-          </a:bodyPr>
-          <a:lstStyle/>
-          <a:p>
-            <a:pPr algn="l">
-              <a:lnSpc>
-                <a:spcPct val="100000"/>
-              </a:lnSpc>
-              <a:spcAft>
-                <a:spcPts val="600"/>
-              </a:spcAft>
-            </a:pPr>
-            <a:r>
-              <a:rPr sz="1200" b="1">
-                <a:solidFill>
-                  <a:srgbClr val="C2551E"/>
-                </a:solidFill>
-                <a:latin typeface="Helvetica Neue"/>
-              </a:rPr>
-              <a:t>PART 2: RESULTS</a:t>
-            </a:r>
-          </a:p>
-        </p:txBody>
-      </p:sp>
-      <p:sp>
-        <p:nvSpPr>
-          <p:cNvPr id="3" name="TextBox 2"/>
-          <p:cNvSpPr txBox="1"/>
-          <p:nvPr/>
-        </p:nvSpPr>
-        <p:spPr>
-          <a:xfrm>
-            <a:off x="777240" y="777240"/>
-            <a:ext cx="10637215" cy="731520"/>
-          </a:xfrm>
-          <a:prstGeom prst="rect">
-            <a:avLst/>
-          </a:prstGeom>
-          <a:noFill/>
-        </p:spPr>
-        <p:txBody>
-          <a:bodyPr wrap="square">
-            <a:spAutoFit/>
-          </a:bodyPr>
-          <a:lstStyle/>
-          <a:p>
-            <a:pPr algn="l">
-              <a:lnSpc>
-                <a:spcPct val="100000"/>
-              </a:lnSpc>
-              <a:spcAft>
-                <a:spcPts val="600"/>
-              </a:spcAft>
-            </a:pPr>
-            <a:r>
-              <a:rPr sz="2900" b="1">
-                <a:solidFill>
-                  <a:srgbClr val="1F4E79"/>
-                </a:solidFill>
-                <a:latin typeface="Helvetica Neue"/>
-              </a:rPr>
-              <a:t>The transformer's digits, epoch by epoch</a:t>
-            </a:r>
-          </a:p>
-        </p:txBody>
-      </p:sp>
-      <p:sp>
-        <p:nvSpPr>
-          <p:cNvPr id="4" name="Rectangle 3"/>
-          <p:cNvSpPr/>
-          <p:nvPr/>
-        </p:nvSpPr>
-        <p:spPr>
-          <a:xfrm>
-            <a:off x="777240" y="1481328"/>
-            <a:ext cx="10637215" cy="15240"/>
-          </a:xfrm>
-          <a:prstGeom prst="rect">
-            <a:avLst/>
-          </a:prstGeom>
-          <a:solidFill>
-            <a:srgbClr val="D8D3CB"/>
-          </a:solidFill>
-          <a:ln>
-            <a:noFill/>
-          </a:ln>
-          <a:effectLst/>
-        </p:spPr>
-        <p:style>
-          <a:lnRef idx="1">
-            <a:schemeClr val="accent1"/>
-          </a:lnRef>
-          <a:fillRef idx="3">
-            <a:schemeClr val="accent1"/>
-          </a:fillRef>
-          <a:effectRef idx="2">
-            <a:schemeClr val="accent1"/>
-          </a:effectRef>
-          <a:fontRef idx="minor">
-            <a:schemeClr val="lt1"/>
-          </a:fontRef>
-        </p:style>
-        <p:txBody>
-          <a:bodyPr rtlCol="0" anchor="ctr"/>
-          <a:lstStyle/>
-          <a:p>
-            <a:pPr algn="ctr"/>
-            <a:endParaRPr/>
-          </a:p>
-        </p:txBody>
-      </p:sp>
-      <p:pic>
-        <p:nvPicPr>
-          <p:cNvPr id="5" name="Picture 4" descr="grids2.png"/>
-          <p:cNvPicPr>
-            <a:picLocks noChangeAspect="1"/>
-          </p:cNvPicPr>
-          <p:nvPr/>
-        </p:nvPicPr>
-        <p:blipFill>
-          <a:blip r:embed="rId2"/>
-          <a:stretch>
-            <a:fillRect/>
-          </a:stretch>
-        </p:blipFill>
-        <p:spPr>
-          <a:xfrm>
-            <a:off x="1404589" y="1783080"/>
-            <a:ext cx="9382516" cy="3749039"/>
-          </a:xfrm>
-          <a:prstGeom prst="rect">
-            <a:avLst/>
-          </a:prstGeom>
-        </p:spPr>
-      </p:pic>
-      <p:sp>
-        <p:nvSpPr>
-          <p:cNvPr id="6" name="TextBox 5"/>
-          <p:cNvSpPr txBox="1"/>
-          <p:nvPr/>
-        </p:nvSpPr>
-        <p:spPr>
-          <a:xfrm>
-            <a:off x="777240" y="5897880"/>
-            <a:ext cx="10637215" cy="548640"/>
-          </a:xfrm>
-          <a:prstGeom prst="rect">
-            <a:avLst/>
-          </a:prstGeom>
-          <a:noFill/>
-        </p:spPr>
-        <p:txBody>
-          <a:bodyPr wrap="square">
-            <a:spAutoFit/>
-          </a:bodyPr>
-          <a:lstStyle/>
-          <a:p>
-            <a:pPr algn="ctr">
-              <a:lnSpc>
-                <a:spcPct val="100000"/>
-              </a:lnSpc>
-              <a:spcAft>
-                <a:spcPts val="600"/>
-              </a:spcAft>
-            </a:pPr>
-            <a:r>
-              <a:rPr sz="1400" b="0">
-                <a:solidFill>
-                  <a:srgbClr val="6B7582"/>
-                </a:solidFill>
-                <a:latin typeface="Helvetica Neue"/>
-              </a:rPr>
               <a:t>Rows are digits 0-9, same starting noise after every epoch (50-step sampler with guidance w = 3).</a:t>
-            </a:r>
-          </a:p>
-        </p:txBody>
-      </p:sp>
-    </p:spTree>
-  </p:cSld>
-  <p:clrMapOvr>
-    <a:masterClrMapping/>
-  </p:clrMapOvr>
-</p:sld>
-</file>
-
-<file path=ppt/slides/slide26.xml><?xml version="1.0" encoding="utf-8"?>
-<p:sld xmlns:a="http://schemas.openxmlformats.org/drawingml/2006/main" xmlns:r="http://schemas.openxmlformats.org/officeDocument/2006/relationships" xmlns:p="http://schemas.openxmlformats.org/presentationml/2006/main">
-  <p:cSld>
-    <p:bg>
-      <p:bgPr>
-        <a:solidFill>
-          <a:srgbClr val="FAF9F7"/>
-        </a:solidFill>
-        <a:effectLst/>
-      </p:bgPr>
-    </p:bg>
-    <p:spTree>
-      <p:nvGrpSpPr>
-        <p:cNvPr id="1" name=""/>
-        <p:cNvGrpSpPr/>
-        <p:nvPr/>
-      </p:nvGrpSpPr>
-      <p:grpSpPr>
-        <a:xfrm>
-          <a:off x="0" y="0"/>
-          <a:ext cx="0" cy="0"/>
-          <a:chOff x="0" y="0"/>
-          <a:chExt cx="0" cy="0"/>
-        </a:xfrm>
-      </p:grpSpPr>
-      <p:sp>
-        <p:nvSpPr>
-          <p:cNvPr id="2" name="TextBox 1"/>
-          <p:cNvSpPr txBox="1"/>
-          <p:nvPr/>
-        </p:nvSpPr>
-        <p:spPr>
-          <a:xfrm>
-            <a:off x="777240" y="457200"/>
-            <a:ext cx="10637215" cy="320040"/>
-          </a:xfrm>
-          <a:prstGeom prst="rect">
-            <a:avLst/>
-          </a:prstGeom>
-          <a:noFill/>
-        </p:spPr>
-        <p:txBody>
-          <a:bodyPr wrap="square">
-            <a:spAutoFit/>
-          </a:bodyPr>
-          <a:lstStyle/>
-          <a:p>
-            <a:pPr algn="l">
-              <a:lnSpc>
-                <a:spcPct val="100000"/>
-              </a:lnSpc>
-              <a:spcAft>
-                <a:spcPts val="600"/>
-              </a:spcAft>
-            </a:pPr>
-            <a:r>
-              <a:rPr sz="1200" b="1">
-                <a:solidFill>
-                  <a:srgbClr val="C2551E"/>
-                </a:solidFill>
-                <a:latin typeface="Helvetica Neue"/>
-              </a:rPr>
-              <a:t>PART 2: RESULTS</a:t>
-            </a:r>
-          </a:p>
-        </p:txBody>
-      </p:sp>
-      <p:sp>
-        <p:nvSpPr>
-          <p:cNvPr id="3" name="TextBox 2"/>
-          <p:cNvSpPr txBox="1"/>
-          <p:nvPr/>
-        </p:nvSpPr>
-        <p:spPr>
-          <a:xfrm>
-            <a:off x="777240" y="777240"/>
-            <a:ext cx="10637215" cy="731520"/>
-          </a:xfrm>
-          <a:prstGeom prst="rect">
-            <a:avLst/>
-          </a:prstGeom>
-          <a:noFill/>
-        </p:spPr>
-        <p:txBody>
-          <a:bodyPr wrap="square">
-            <a:spAutoFit/>
-          </a:bodyPr>
-          <a:lstStyle/>
-          <a:p>
-            <a:pPr algn="l">
-              <a:lnSpc>
-                <a:spcPct val="100000"/>
-              </a:lnSpc>
-              <a:spcAft>
-                <a:spcPts val="600"/>
-              </a:spcAft>
-            </a:pPr>
-            <a:r>
-              <a:rPr sz="2900" b="1">
-                <a:solidFill>
-                  <a:srgbClr val="1F4E79"/>
-                </a:solidFill>
-                <a:latin typeface="Helvetica Neue"/>
-              </a:rPr>
-              <a:t>Same request, same seeds: U-Net vs transformer</a:t>
-            </a:r>
-          </a:p>
-        </p:txBody>
-      </p:sp>
-      <p:sp>
-        <p:nvSpPr>
-          <p:cNvPr id="4" name="Rectangle 3"/>
-          <p:cNvSpPr/>
-          <p:nvPr/>
-        </p:nvSpPr>
-        <p:spPr>
-          <a:xfrm>
-            <a:off x="777240" y="1481328"/>
-            <a:ext cx="10637215" cy="15240"/>
-          </a:xfrm>
-          <a:prstGeom prst="rect">
-            <a:avLst/>
-          </a:prstGeom>
-          <a:solidFill>
-            <a:srgbClr val="D8D3CB"/>
-          </a:solidFill>
-          <a:ln>
-            <a:noFill/>
-          </a:ln>
-          <a:effectLst/>
-        </p:spPr>
-        <p:style>
-          <a:lnRef idx="1">
-            <a:schemeClr val="accent1"/>
-          </a:lnRef>
-          <a:fillRef idx="3">
-            <a:schemeClr val="accent1"/>
-          </a:fillRef>
-          <a:effectRef idx="2">
-            <a:schemeClr val="accent1"/>
-          </a:effectRef>
-          <a:fontRef idx="minor">
-            <a:schemeClr val="lt1"/>
-          </a:fontRef>
-        </p:style>
-        <p:txBody>
-          <a:bodyPr rtlCol="0" anchor="ctr"/>
-          <a:lstStyle/>
-          <a:p>
-            <a:pPr algn="ctr"/>
-            <a:endParaRPr/>
-          </a:p>
-        </p:txBody>
-      </p:sp>
-      <p:sp>
-        <p:nvSpPr>
-          <p:cNvPr id="5" name="TextBox 4"/>
-          <p:cNvSpPr txBox="1"/>
-          <p:nvPr/>
-        </p:nvSpPr>
-        <p:spPr>
-          <a:xfrm>
-            <a:off x="777240" y="1828800"/>
-            <a:ext cx="10637215" cy="4572000"/>
-          </a:xfrm>
-          <a:prstGeom prst="rect">
-            <a:avLst/>
-          </a:prstGeom>
-          <a:noFill/>
-        </p:spPr>
-        <p:txBody>
-          <a:bodyPr wrap="square">
-            <a:spAutoFit/>
-          </a:bodyPr>
-          <a:lstStyle/>
-          <a:p>
-            <a:pPr algn="l">
-              <a:lnSpc>
-                <a:spcPct val="115000"/>
-              </a:lnSpc>
-              <a:spcAft>
-                <a:spcPts val="600"/>
-              </a:spcAft>
-            </a:pPr>
-            <a:r>
-              <a:rPr sz="1900" b="1">
-                <a:solidFill>
-                  <a:srgbClr val="1C222B"/>
-                </a:solidFill>
-                <a:latin typeface="Helvetica Neue"/>
-              </a:rPr>
-              <a:t>Not run yet. The transformer's samples comes from:</a:t>
-            </a:r>
-          </a:p>
-          <a:p>
-            <a:pPr algn="l">
-              <a:lnSpc>
-                <a:spcPct val="115000"/>
-              </a:lnSpc>
-              <a:spcAft>
-                <a:spcPts val="600"/>
-              </a:spcAft>
-            </a:pPr>
-            <a:r>
-              <a:rPr sz="1500" b="0">
-                <a:solidFill>
-                  <a:srgbClr val="1C222B"/>
-                </a:solidFill>
-                <a:latin typeface="Menlo"/>
-              </a:rPr>
-              <a:t>python sample.py --run part2_transformer --sampler ddpm --guidance 1 --trajectory</a:t>
-            </a:r>
-          </a:p>
-          <a:p>
-            <a:pPr algn="l">
-              <a:lnSpc>
-                <a:spcPct val="115000"/>
-              </a:lnSpc>
-              <a:spcAft>
-                <a:spcPts val="600"/>
-              </a:spcAft>
-            </a:pPr>
-            <a:r>
-              <a:rPr sz="1500" b="0">
-                <a:solidFill>
-                  <a:srgbClr val="6B7582"/>
-                </a:solidFill>
-                <a:latin typeface="Helvetica Neue"/>
-              </a:rPr>
-              <a:t>Then rebuild the deck:  python slides/build_slides.py</a:t>
             </a:r>
           </a:p>
         </p:txBody>
